--- a/outputs/presentation/Analytics_Slides.pptx
+++ b/outputs/presentation/Analytics_Slides.pptx
@@ -7398,7 +7398,7 @@
               </a:defRPr>
             </a:pPr>
             <a:r>
-              <a:t>WHAT THIS SHOWS: Top-line numbers for the whole marketing program. Pipeline = all deal value in the funnel. Won Revenue = deals actually closed and signed. HOW TO READ: Compare Sourced vs Influenced — Sourced ($4.2M) means marketing is listed as the CRM origin; Influenced ($6.3M) means marketing touched the account at any point before the deal, even if sales sourced it officially. INSIGHT: Win rate across all channels is 33% (1 in 3 deals closes). Marketing-sourced deals close at ~10% because marketing finds prospects earlier in their journey — they need longer nurture before they're ready to buy.</a:t>
+              <a:t>WHAT THIS SHOWS: Top-line numbers for the whole marketing program. Pipeline = all deal value in the funnel. Won Revenue = deals actually closed and signed. HOW TO READ: Compare Sourced vs Influenced — Sourced ($4.2M) means marketing is listed as the CRM origin; Influenced ($6.5M) means marketing touched the account at any point before the deal, even if sales sourced it officially. INSIGHT: Win rate across all channels is 33% (1 in 3 deals closes). Marketing-sourced deals close at ~10% because marketing finds prospects earlier in their journey — they need longer nurture before they're ready to buy.</a:t>
             </a:r>
           </a:p>
         </p:txBody>
